--- a/docs/TAAB-Presentation.pptx
+++ b/docs/TAAB-Presentation.pptx
@@ -1196,7 +1196,7 @@
           <a:lstStyle/>
           <a:p>
             <a:r>
-              <a:t>Let's talk money honestly, because this is where people get scared. Your starting cost is basically zero a month. The tools run on free tiers, and the only recurring cost is one cheap domain - about ten dollars a year. There is exactly one exception, and I'll be straight with you: Google now asks for a one-time thirty dollar prepayment, about forty-five thousand naira, before it will run your free Cloud server. A Naira card works - you do not need an international card. If you would rather not, a small paid host is about ten dollars a month for roughly three months instead. Either way that is the only hosting cost in this whole thing - and now you know about it before you spend a naira. Now, how you actually get paid. Three models. Project-based - a hundred to five hundred thousand naira for a one-off build. Fast cash, but no stability month to month. Retainer - eighty to two hundred thousand a month. Recurring, and it's the best structure for long-term income. And revenue share, a percentage of results - high risk, high reward, only when you know the niche and the ROI is obvious to the client. Let's make this real. Open the ROI Calculator - link's in the chat now. Put in your own numbers: what you'd charge, how many clients, your costs. It gives you your break-even month and a twelve-month projection built from your inputs, not mine. And look at the maths - one hundred and fifty thousand naira project pays back a whole year of running costs many times over. The tools aren't the investment. Your skill is.</a:t>
+              <a:t>Let's talk money honestly, because this is where people get scared. Your starting cost is basically zero a month. The tools run on free tiers, and the only recurring cost is one cheap domain - about a dollar for the first year on a dot site or dot online, or ten to fifteen for a dot com. There is exactly one exception, and I'll be straight with you: Google now asks for a one-time thirty dollar prepayment, about forty-five thousand naira, before it will run your free Cloud server. A Naira card works - you do not need an international card. If you would rather not, a small paid host is about ten dollars a month for roughly three months instead. Either way that is the only hosting cost in this whole thing - and now you know about it before you spend a naira. Now, how you actually get paid. Three models. Project-based - a hundred to five hundred thousand naira for a one-off build. Fast cash, but no stability month to month. Retainer - eighty to two hundred thousand a month. Recurring, and it's the best structure for long-term income. And revenue share, a percentage of results - high risk, high reward, only when you know the niche and the ROI is obvious to the client. Let's make this real. Open the ROI Calculator - link's in the chat now. Put in your own numbers: what you'd charge, how many clients, your costs. It gives you your break-even month and a twelve-month projection built from your inputs, not mine. And look at the maths - one hundred and fifty thousand naira project pays back a whole year of running costs many times over. The tools aren't the investment. Your skill is.</a:t>
             </a:r>
           </a:p>
         </p:txBody>
